--- a/submission/VUKA-Pitch-Deck.pptx
+++ b/submission/VUKA-Pitch-Deck.pptx
@@ -23144,7 +23144,7 @@
                 <a:ea typeface="Calibri" pitchFamily="34" charset="-122"/>
                 <a:cs typeface="Calibri" pitchFamily="34" charset="-120"/>
               </a:rPr>
-              <a:t>SKILLS AND CAPABILITIES</a:t>
+              <a:t>TEAM COMPOSITION · SKILLS AND CAPABILITIES</a:t>
             </a:r>
             <a:endParaRPr lang="en-US" sz="1100" dirty="0"/>
           </a:p>
@@ -23415,7 +23415,7 @@
         <p:spPr>
           <a:xfrm>
             <a:off x="548640" y="694944"/>
-            <a:ext cx="11064240" cy="1325880"/>
+            <a:ext cx="11064240" cy="914400"/>
           </a:xfrm>
           <a:prstGeom prst="rect">
             <a:avLst/>
@@ -23429,12 +23429,12 @@
           <a:p>
             <a:pPr indent="0" marL="0">
               <a:lnSpc>
-                <a:spcPts val="3800"/>
+                <a:spcPts val="3400"/>
               </a:lnSpc>
               <a:buNone/>
             </a:pPr>
             <a:r>
-              <a:rPr lang="en-US" sz="3400" b="1" dirty="0">
+              <a:rPr lang="en-US" sz="3000" b="1" dirty="0">
                 <a:solidFill>
                   <a:srgbClr val="F2F4F7"/>
                 </a:solidFill>
@@ -23442,9 +23442,29 @@
                 <a:ea typeface="Cambria" pitchFamily="34" charset="-122"/>
                 <a:cs typeface="Cambria" pitchFamily="34" charset="-120"/>
               </a:rPr>
-              <a:t>Three builders. Contracts frozen before implementation.</a:t>
-            </a:r>
-            <a:endParaRPr lang="en-US" sz="3400" dirty="0"/>
+              <a:t>Seven builders, four universities.</a:t>
+            </a:r>
+            <a:endParaRPr lang="en-US" sz="3000" dirty="0"/>
+          </a:p>
+          <a:p>
+            <a:pPr indent="0" marL="0">
+              <a:lnSpc>
+                <a:spcPts val="3400"/>
+              </a:lnSpc>
+              <a:buNone/>
+            </a:pPr>
+            <a:r>
+              <a:rPr lang="en-US" sz="3000" b="1" dirty="0">
+                <a:solidFill>
+                  <a:srgbClr val="F2F4F7"/>
+                </a:solidFill>
+                <a:latin typeface="Cambria" pitchFamily="34" charset="0"/>
+                <a:ea typeface="Cambria" pitchFamily="34" charset="-122"/>
+                <a:cs typeface="Cambria" pitchFamily="34" charset="-120"/>
+              </a:rPr>
+              <a:t>Contracts frozen before implementation.</a:t>
+            </a:r>
+            <a:endParaRPr lang="en-US" sz="3000" dirty="0"/>
           </a:p>
         </p:txBody>
       </p:sp>
@@ -23456,12 +23476,12 @@
         </p:nvSpPr>
         <p:spPr>
           <a:xfrm>
-            <a:off x="548640" y="1737360"/>
-            <a:ext cx="3493008" cy="3200400"/>
+            <a:off x="548640" y="1645920"/>
+            <a:ext cx="2596896" cy="1444752"/>
           </a:xfrm>
           <a:prstGeom prst="roundRect">
             <a:avLst>
-              <a:gd name="adj" fmla="val 1714"/>
+              <a:gd name="adj" fmla="val 3797"/>
             </a:avLst>
           </a:prstGeom>
           <a:solidFill>
@@ -23483,8 +23503,8 @@
         </p:nvSpPr>
         <p:spPr>
           <a:xfrm>
-            <a:off x="786384" y="1938528"/>
-            <a:ext cx="475488" cy="475488"/>
+            <a:off x="694944" y="1773936"/>
+            <a:ext cx="365760" cy="365760"/>
           </a:xfrm>
           <a:prstGeom prst="ellipse">
             <a:avLst/>
@@ -23508,8 +23528,8 @@
         </p:nvSpPr>
         <p:spPr>
           <a:xfrm>
-            <a:off x="786384" y="1938528"/>
-            <a:ext cx="475488" cy="475488"/>
+            <a:off x="694944" y="1773936"/>
+            <a:ext cx="365760" cy="365760"/>
           </a:xfrm>
           <a:prstGeom prst="rect">
             <a:avLst/>
@@ -23525,7 +23545,7 @@
               <a:buNone/>
             </a:pPr>
             <a:r>
-              <a:rPr lang="en-US" sz="1144" b="1" dirty="0">
+              <a:rPr lang="en-US" sz="880" b="1" dirty="0">
                 <a:solidFill>
                   <a:srgbClr val="FFFFFF"/>
                 </a:solidFill>
@@ -23533,9 +23553,9 @@
                 <a:ea typeface="Calibri" pitchFamily="34" charset="-122"/>
                 <a:cs typeface="Calibri" pitchFamily="34" charset="-120"/>
               </a:rPr>
-              <a:t>A</a:t>
-            </a:r>
-            <a:endParaRPr lang="en-US" sz="1144" dirty="0"/>
+              <a:t>LH</a:t>
+            </a:r>
+            <a:endParaRPr lang="en-US" sz="880" dirty="0"/>
           </a:p>
         </p:txBody>
       </p:sp>
@@ -23547,8 +23567,125 @@
         </p:nvSpPr>
         <p:spPr>
           <a:xfrm>
-            <a:off x="786384" y="2523744"/>
-            <a:ext cx="3017520" cy="512064"/>
+            <a:off x="1133856" y="1755648"/>
+            <a:ext cx="1883664" cy="219456"/>
+          </a:xfrm>
+          <a:prstGeom prst="rect">
+            <a:avLst/>
+          </a:prstGeom>
+          <a:noFill/>
+          <a:ln/>
+        </p:spPr>
+        <p:txBody>
+          <a:bodyPr wrap="square" lIns="0" tIns="0" rIns="0" bIns="0" rtlCol="0" anchor="ctr"/>
+          <a:lstStyle/>
+          <a:p>
+            <a:pPr indent="0" marL="0">
+              <a:buNone/>
+            </a:pPr>
+            <a:r>
+              <a:rPr lang="en-US" sz="1000" b="1" dirty="0">
+                <a:solidFill>
+                  <a:srgbClr val="F2F4F7"/>
+                </a:solidFill>
+                <a:latin typeface="Calibri" pitchFamily="34" charset="0"/>
+                <a:ea typeface="Calibri" pitchFamily="34" charset="-122"/>
+                <a:cs typeface="Calibri" pitchFamily="34" charset="-120"/>
+              </a:rPr>
+              <a:t>Lethabo Hoaeane</a:t>
+            </a:r>
+            <a:endParaRPr lang="en-US" sz="1000" dirty="0"/>
+          </a:p>
+        </p:txBody>
+      </p:sp>
+      <p:sp>
+        <p:nvSpPr>
+          <p:cNvPr id="16" name="Text 14"/>
+          <p:cNvSpPr/>
+          <p:nvPr/>
+        </p:nvSpPr>
+        <p:spPr>
+          <a:xfrm>
+            <a:off x="1133856" y="1965960"/>
+            <a:ext cx="1883664" cy="173736"/>
+          </a:xfrm>
+          <a:prstGeom prst="rect">
+            <a:avLst/>
+          </a:prstGeom>
+          <a:noFill/>
+          <a:ln/>
+        </p:spPr>
+        <p:txBody>
+          <a:bodyPr wrap="square" lIns="0" tIns="0" rIns="0" bIns="0" rtlCol="0" anchor="ctr"/>
+          <a:lstStyle/>
+          <a:p>
+            <a:pPr indent="0" marL="0">
+              <a:buNone/>
+            </a:pPr>
+            <a:r>
+              <a:rPr lang="en-US" sz="750" dirty="0">
+                <a:solidFill>
+                  <a:srgbClr val="9AA5B1"/>
+                </a:solidFill>
+                <a:latin typeface="Calibri" pitchFamily="34" charset="0"/>
+                <a:ea typeface="Calibri" pitchFamily="34" charset="-122"/>
+                <a:cs typeface="Calibri" pitchFamily="34" charset="-120"/>
+              </a:rPr>
+              <a:t>University of South Africa</a:t>
+            </a:r>
+            <a:endParaRPr lang="en-US" sz="750" dirty="0"/>
+          </a:p>
+        </p:txBody>
+      </p:sp>
+      <p:sp>
+        <p:nvSpPr>
+          <p:cNvPr id="17" name="Text 15"/>
+          <p:cNvSpPr/>
+          <p:nvPr/>
+        </p:nvSpPr>
+        <p:spPr>
+          <a:xfrm>
+            <a:off x="694944" y="2212848"/>
+            <a:ext cx="2304288" cy="201168"/>
+          </a:xfrm>
+          <a:prstGeom prst="rect">
+            <a:avLst/>
+          </a:prstGeom>
+          <a:noFill/>
+          <a:ln/>
+        </p:spPr>
+        <p:txBody>
+          <a:bodyPr wrap="square" lIns="0" tIns="0" rIns="0" bIns="0" rtlCol="0" anchor="ctr"/>
+          <a:lstStyle/>
+          <a:p>
+            <a:pPr indent="0" marL="0">
+              <a:buNone/>
+            </a:pPr>
+            <a:r>
+              <a:rPr lang="en-US" sz="850" b="1" spc="80" kern="0" dirty="0">
+                <a:solidFill>
+                  <a:srgbClr val="2F7AD6"/>
+                </a:solidFill>
+                <a:latin typeface="Calibri" pitchFamily="34" charset="0"/>
+                <a:ea typeface="Calibri" pitchFamily="34" charset="-122"/>
+                <a:cs typeface="Calibri" pitchFamily="34" charset="-120"/>
+              </a:rPr>
+              <a:t>PROFILER · CO-LEAD</a:t>
+            </a:r>
+            <a:endParaRPr lang="en-US" sz="850" dirty="0"/>
+          </a:p>
+        </p:txBody>
+      </p:sp>
+      <p:sp>
+        <p:nvSpPr>
+          <p:cNvPr id="18" name="Text 16"/>
+          <p:cNvSpPr/>
+          <p:nvPr/>
+        </p:nvSpPr>
+        <p:spPr>
+          <a:xfrm>
+            <a:off x="694944" y="2432304"/>
+            <a:ext cx="2304288" cy="566928"/>
           </a:xfrm>
           <a:prstGeom prst="rect">
             <a:avLst/>
@@ -23562,58 +23699,12 @@
           <a:p>
             <a:pPr indent="0" marL="0">
               <a:lnSpc>
-                <a:spcPts val="1800"/>
+                <a:spcPts val="1100"/>
               </a:lnSpc>
               <a:buNone/>
             </a:pPr>
             <a:r>
-              <a:rPr lang="en-US" sz="1350" b="1" dirty="0">
-                <a:solidFill>
-                  <a:srgbClr val="F2F4F7"/>
-                </a:solidFill>
-                <a:latin typeface="Cambria" pitchFamily="34" charset="0"/>
-                <a:ea typeface="Cambria" pitchFamily="34" charset="-122"/>
-                <a:cs typeface="Cambria" pitchFamily="34" charset="-120"/>
-              </a:rPr>
-              <a:t>Architecture, mobile, ML integration</a:t>
-            </a:r>
-            <a:endParaRPr lang="en-US" sz="1350" dirty="0"/>
-          </a:p>
-        </p:txBody>
-      </p:sp>
-      <p:sp>
-        <p:nvSpPr>
-          <p:cNvPr id="16" name="Text 14"/>
-          <p:cNvSpPr/>
-          <p:nvPr/>
-        </p:nvSpPr>
-        <p:spPr>
-          <a:xfrm>
-            <a:off x="786384" y="3072384"/>
-            <a:ext cx="3017520" cy="1737360"/>
-          </a:xfrm>
-          <a:prstGeom prst="rect">
-            <a:avLst/>
-          </a:prstGeom>
-          <a:noFill/>
-          <a:ln/>
-        </p:spPr>
-        <p:txBody>
-          <a:bodyPr wrap="square" lIns="0" tIns="0" rIns="0" bIns="0" rtlCol="0" anchor="t"/>
-          <a:lstStyle/>
-          <a:p>
-            <a:pPr marL="152400" indent="-152400">
-              <a:lnSpc>
-                <a:spcPts val="1400"/>
-              </a:lnSpc>
-              <a:spcAft>
-                <a:spcPts val="500"/>
-              </a:spcAft>
-              <a:buSzPct val="100000"/>
-              <a:buChar char="•"/>
-            </a:pPr>
-            <a:r>
-              <a:rPr lang="en-US" sz="1050" dirty="0">
+              <a:rPr lang="en-US" sz="850" dirty="0">
                 <a:solidFill>
                   <a:srgbClr val="9AA5B1"/>
                 </a:solidFill>
@@ -23621,98 +23712,26 @@
                 <a:ea typeface="Calibri" pitchFamily="34" charset="-122"/>
                 <a:cs typeface="Calibri" pitchFamily="34" charset="-120"/>
               </a:rPr>
-              <a:t>Kotlin foreground service, on-device INT8 inference</a:t>
-            </a:r>
-            <a:endParaRPr lang="en-US" sz="1050" dirty="0"/>
-          </a:p>
-          <a:p>
-            <a:pPr marL="152400" indent="-152400">
-              <a:lnSpc>
-                <a:spcPts val="1400"/>
-              </a:lnSpc>
-              <a:spcAft>
-                <a:spcPts val="500"/>
-              </a:spcAft>
-              <a:buSzPct val="100000"/>
-              <a:buChar char="•"/>
-            </a:pPr>
-            <a:r>
-              <a:rPr lang="en-US" sz="1050" dirty="0">
-                <a:solidFill>
-                  <a:srgbClr val="9AA5B1"/>
-                </a:solidFill>
-                <a:latin typeface="Calibri" pitchFamily="34" charset="0"/>
-                <a:ea typeface="Calibri" pitchFamily="34" charset="-122"/>
-                <a:cs typeface="Calibri" pitchFamily="34" charset="-120"/>
-              </a:rPr>
-              <a:t>Calibrated fusion + conflict gate</a:t>
-            </a:r>
-            <a:endParaRPr lang="en-US" sz="1050" dirty="0"/>
-          </a:p>
-          <a:p>
-            <a:pPr marL="152400" indent="-152400">
-              <a:lnSpc>
-                <a:spcPts val="1400"/>
-              </a:lnSpc>
-              <a:spcAft>
-                <a:spcPts val="500"/>
-              </a:spcAft>
-              <a:buSzPct val="100000"/>
-              <a:buChar char="•"/>
-            </a:pPr>
-            <a:r>
-              <a:rPr lang="en-US" sz="1050" dirty="0">
-                <a:solidFill>
-                  <a:srgbClr val="9AA5B1"/>
-                </a:solidFill>
-                <a:latin typeface="Calibri" pitchFamily="34" charset="0"/>
-                <a:ea typeface="Calibri" pitchFamily="34" charset="-122"/>
-                <a:cs typeface="Calibri" pitchFamily="34" charset="-120"/>
-              </a:rPr>
-              <a:t>L0–L3 state machine with hysteresis</a:t>
-            </a:r>
-            <a:endParaRPr lang="en-US" sz="1050" dirty="0"/>
-          </a:p>
-          <a:p>
-            <a:pPr marL="152400" indent="-152400">
-              <a:lnSpc>
-                <a:spcPts val="1400"/>
-              </a:lnSpc>
-              <a:spcAft>
-                <a:spcPts val="500"/>
-              </a:spcAft>
-              <a:buSzPct val="100000"/>
-              <a:buChar char="•"/>
-            </a:pPr>
-            <a:r>
-              <a:rPr lang="en-US" sz="1050" dirty="0">
-                <a:solidFill>
-                  <a:srgbClr val="9AA5B1"/>
-                </a:solidFill>
-                <a:latin typeface="Calibri" pitchFamily="34" charset="0"/>
-                <a:ea typeface="Calibri" pitchFamily="34" charset="-122"/>
-                <a:cs typeface="Calibri" pitchFamily="34" charset="-120"/>
-              </a:rPr>
-              <a:t>The spec, the model manifest, the ADRs</a:t>
-            </a:r>
-            <a:endParaRPr lang="en-US" sz="1050" dirty="0"/>
-          </a:p>
-        </p:txBody>
-      </p:sp>
-      <p:sp>
-        <p:nvSpPr>
-          <p:cNvPr id="17" name="Shape 15"/>
-          <p:cNvSpPr/>
-          <p:nvPr/>
-        </p:nvSpPr>
-        <p:spPr>
-          <a:xfrm>
-            <a:off x="4261104" y="1737360"/>
-            <a:ext cx="3493008" cy="3200400"/>
+              <a:t>Architecture, product and UX. The spec, the ADRs, final review.</a:t>
+            </a:r>
+            <a:endParaRPr lang="en-US" sz="850" dirty="0"/>
+          </a:p>
+        </p:txBody>
+      </p:sp>
+      <p:sp>
+        <p:nvSpPr>
+          <p:cNvPr id="19" name="Shape 17"/>
+          <p:cNvSpPr/>
+          <p:nvPr/>
+        </p:nvSpPr>
+        <p:spPr>
+          <a:xfrm>
+            <a:off x="3364992" y="1645920"/>
+            <a:ext cx="2596896" cy="1444752"/>
           </a:xfrm>
           <a:prstGeom prst="roundRect">
             <a:avLst>
-              <a:gd name="adj" fmla="val 1714"/>
+              <a:gd name="adj" fmla="val 3797"/>
             </a:avLst>
           </a:prstGeom>
           <a:solidFill>
@@ -23728,14 +23747,14 @@
       </p:sp>
       <p:sp>
         <p:nvSpPr>
-          <p:cNvPr id="18" name="Shape 16"/>
-          <p:cNvSpPr/>
-          <p:nvPr/>
-        </p:nvSpPr>
-        <p:spPr>
-          <a:xfrm>
-            <a:off x="4498848" y="1938528"/>
-            <a:ext cx="475488" cy="475488"/>
+          <p:cNvPr id="20" name="Shape 18"/>
+          <p:cNvSpPr/>
+          <p:nvPr/>
+        </p:nvSpPr>
+        <p:spPr>
+          <a:xfrm>
+            <a:off x="3511296" y="1773936"/>
+            <a:ext cx="365760" cy="365760"/>
           </a:xfrm>
           <a:prstGeom prst="ellipse">
             <a:avLst/>
@@ -23753,14 +23772,14 @@
       </p:sp>
       <p:sp>
         <p:nvSpPr>
-          <p:cNvPr id="19" name="Text 17"/>
-          <p:cNvSpPr/>
-          <p:nvPr/>
-        </p:nvSpPr>
-        <p:spPr>
-          <a:xfrm>
-            <a:off x="4498848" y="1938528"/>
-            <a:ext cx="475488" cy="475488"/>
+          <p:cNvPr id="21" name="Text 19"/>
+          <p:cNvSpPr/>
+          <p:nvPr/>
+        </p:nvSpPr>
+        <p:spPr>
+          <a:xfrm>
+            <a:off x="3511296" y="1773936"/>
+            <a:ext cx="365760" cy="365760"/>
           </a:xfrm>
           <a:prstGeom prst="rect">
             <a:avLst/>
@@ -23776,7 +23795,7 @@
               <a:buNone/>
             </a:pPr>
             <a:r>
-              <a:rPr lang="en-US" sz="1144" b="1" dirty="0">
+              <a:rPr lang="en-US" sz="880" b="1" dirty="0">
                 <a:solidFill>
                   <a:srgbClr val="FFFFFF"/>
                 </a:solidFill>
@@ -23784,22 +23803,139 @@
                 <a:ea typeface="Calibri" pitchFamily="34" charset="-122"/>
                 <a:cs typeface="Calibri" pitchFamily="34" charset="-120"/>
               </a:rPr>
-              <a:t>B</a:t>
-            </a:r>
-            <a:endParaRPr lang="en-US" sz="1144" dirty="0"/>
-          </a:p>
-        </p:txBody>
-      </p:sp>
-      <p:sp>
-        <p:nvSpPr>
-          <p:cNvPr id="20" name="Text 18"/>
-          <p:cNvSpPr/>
-          <p:nvPr/>
-        </p:nvSpPr>
-        <p:spPr>
-          <a:xfrm>
-            <a:off x="4498848" y="2523744"/>
-            <a:ext cx="3017520" cy="512064"/>
+              <a:t>SK</a:t>
+            </a:r>
+            <a:endParaRPr lang="en-US" sz="880" dirty="0"/>
+          </a:p>
+        </p:txBody>
+      </p:sp>
+      <p:sp>
+        <p:nvSpPr>
+          <p:cNvPr id="22" name="Text 20"/>
+          <p:cNvSpPr/>
+          <p:nvPr/>
+        </p:nvSpPr>
+        <p:spPr>
+          <a:xfrm>
+            <a:off x="3950208" y="1755648"/>
+            <a:ext cx="1883664" cy="219456"/>
+          </a:xfrm>
+          <a:prstGeom prst="rect">
+            <a:avLst/>
+          </a:prstGeom>
+          <a:noFill/>
+          <a:ln/>
+        </p:spPr>
+        <p:txBody>
+          <a:bodyPr wrap="square" lIns="0" tIns="0" rIns="0" bIns="0" rtlCol="0" anchor="ctr"/>
+          <a:lstStyle/>
+          <a:p>
+            <a:pPr indent="0" marL="0">
+              <a:buNone/>
+            </a:pPr>
+            <a:r>
+              <a:rPr lang="en-US" sz="1000" b="1" dirty="0">
+                <a:solidFill>
+                  <a:srgbClr val="F2F4F7"/>
+                </a:solidFill>
+                <a:latin typeface="Calibri" pitchFamily="34" charset="0"/>
+                <a:ea typeface="Calibri" pitchFamily="34" charset="-122"/>
+                <a:cs typeface="Calibri" pitchFamily="34" charset="-120"/>
+              </a:rPr>
+              <a:t>Sibusiso Khumalo</a:t>
+            </a:r>
+            <a:endParaRPr lang="en-US" sz="1000" dirty="0"/>
+          </a:p>
+        </p:txBody>
+      </p:sp>
+      <p:sp>
+        <p:nvSpPr>
+          <p:cNvPr id="23" name="Text 21"/>
+          <p:cNvSpPr/>
+          <p:nvPr/>
+        </p:nvSpPr>
+        <p:spPr>
+          <a:xfrm>
+            <a:off x="3950208" y="1965960"/>
+            <a:ext cx="1883664" cy="173736"/>
+          </a:xfrm>
+          <a:prstGeom prst="rect">
+            <a:avLst/>
+          </a:prstGeom>
+          <a:noFill/>
+          <a:ln/>
+        </p:spPr>
+        <p:txBody>
+          <a:bodyPr wrap="square" lIns="0" tIns="0" rIns="0" bIns="0" rtlCol="0" anchor="ctr"/>
+          <a:lstStyle/>
+          <a:p>
+            <a:pPr indent="0" marL="0">
+              <a:buNone/>
+            </a:pPr>
+            <a:r>
+              <a:rPr lang="en-US" sz="750" dirty="0">
+                <a:solidFill>
+                  <a:srgbClr val="9AA5B1"/>
+                </a:solidFill>
+                <a:latin typeface="Calibri" pitchFamily="34" charset="0"/>
+                <a:ea typeface="Calibri" pitchFamily="34" charset="-122"/>
+                <a:cs typeface="Calibri" pitchFamily="34" charset="-120"/>
+              </a:rPr>
+              <a:t>Witwatersrand</a:t>
+            </a:r>
+            <a:endParaRPr lang="en-US" sz="750" dirty="0"/>
+          </a:p>
+        </p:txBody>
+      </p:sp>
+      <p:sp>
+        <p:nvSpPr>
+          <p:cNvPr id="24" name="Text 22"/>
+          <p:cNvSpPr/>
+          <p:nvPr/>
+        </p:nvSpPr>
+        <p:spPr>
+          <a:xfrm>
+            <a:off x="3511296" y="2212848"/>
+            <a:ext cx="2304288" cy="201168"/>
+          </a:xfrm>
+          <a:prstGeom prst="rect">
+            <a:avLst/>
+          </a:prstGeom>
+          <a:noFill/>
+          <a:ln/>
+        </p:spPr>
+        <p:txBody>
+          <a:bodyPr wrap="square" lIns="0" tIns="0" rIns="0" bIns="0" rtlCol="0" anchor="ctr"/>
+          <a:lstStyle/>
+          <a:p>
+            <a:pPr indent="0" marL="0">
+              <a:buNone/>
+            </a:pPr>
+            <a:r>
+              <a:rPr lang="en-US" sz="850" b="1" spc="80" kern="0" dirty="0">
+                <a:solidFill>
+                  <a:srgbClr val="21B573"/>
+                </a:solidFill>
+                <a:latin typeface="Calibri" pitchFamily="34" charset="0"/>
+                <a:ea typeface="Calibri" pitchFamily="34" charset="-122"/>
+                <a:cs typeface="Calibri" pitchFamily="34" charset="-120"/>
+              </a:rPr>
+              <a:t>BACKEND · CO-LEAD</a:t>
+            </a:r>
+            <a:endParaRPr lang="en-US" sz="850" dirty="0"/>
+          </a:p>
+        </p:txBody>
+      </p:sp>
+      <p:sp>
+        <p:nvSpPr>
+          <p:cNvPr id="25" name="Text 23"/>
+          <p:cNvSpPr/>
+          <p:nvPr/>
+        </p:nvSpPr>
+        <p:spPr>
+          <a:xfrm>
+            <a:off x="3511296" y="2432304"/>
+            <a:ext cx="2304288" cy="566928"/>
           </a:xfrm>
           <a:prstGeom prst="rect">
             <a:avLst/>
@@ -23813,58 +23949,12 @@
           <a:p>
             <a:pPr indent="0" marL="0">
               <a:lnSpc>
-                <a:spcPts val="1800"/>
+                <a:spcPts val="1100"/>
               </a:lnSpc>
               <a:buNone/>
             </a:pPr>
             <a:r>
-              <a:rPr lang="en-US" sz="1350" b="1" dirty="0">
-                <a:solidFill>
-                  <a:srgbClr val="F2F4F7"/>
-                </a:solidFill>
-                <a:latin typeface="Cambria" pitchFamily="34" charset="0"/>
-                <a:ea typeface="Cambria" pitchFamily="34" charset="-122"/>
-                <a:cs typeface="Cambria" pitchFamily="34" charset="-120"/>
-              </a:rPr>
-              <a:t>Backend, systems, security engineering</a:t>
-            </a:r>
-            <a:endParaRPr lang="en-US" sz="1350" dirty="0"/>
-          </a:p>
-        </p:txBody>
-      </p:sp>
-      <p:sp>
-        <p:nvSpPr>
-          <p:cNvPr id="21" name="Text 19"/>
-          <p:cNvSpPr/>
-          <p:nvPr/>
-        </p:nvSpPr>
-        <p:spPr>
-          <a:xfrm>
-            <a:off x="4498848" y="3072384"/>
-            <a:ext cx="3017520" cy="1737360"/>
-          </a:xfrm>
-          <a:prstGeom prst="rect">
-            <a:avLst/>
-          </a:prstGeom>
-          <a:noFill/>
-          <a:ln/>
-        </p:spPr>
-        <p:txBody>
-          <a:bodyPr wrap="square" lIns="0" tIns="0" rIns="0" bIns="0" rtlCol="0" anchor="t"/>
-          <a:lstStyle/>
-          <a:p>
-            <a:pPr marL="152400" indent="-152400">
-              <a:lnSpc>
-                <a:spcPts val="1400"/>
-              </a:lnSpc>
-              <a:spcAft>
-                <a:spcPts val="500"/>
-              </a:spcAft>
-              <a:buSzPct val="100000"/>
-              <a:buChar char="•"/>
-            </a:pPr>
-            <a:r>
-              <a:rPr lang="en-US" sz="1050" dirty="0">
+              <a:rPr lang="en-US" sz="850" dirty="0">
                 <a:solidFill>
                   <a:srgbClr val="9AA5B1"/>
                 </a:solidFill>
@@ -23872,98 +23962,26 @@
                 <a:ea typeface="Calibri" pitchFamily="34" charset="-122"/>
                 <a:cs typeface="Calibri" pitchFamily="34" charset="-120"/>
               </a:rPr>
-              <a:t>FastAPI + WS, migrations day zero, rate limiting</a:t>
-            </a:r>
-            <a:endParaRPr lang="en-US" sz="1050" dirty="0"/>
-          </a:p>
-          <a:p>
-            <a:pPr marL="152400" indent="-152400">
-              <a:lnSpc>
-                <a:spcPts val="1400"/>
-              </a:lnSpc>
-              <a:spcAft>
-                <a:spcPts val="500"/>
-              </a:spcAft>
-              <a:buSzPct val="100000"/>
-              <a:buChar char="•"/>
-            </a:pPr>
-            <a:r>
-              <a:rPr lang="en-US" sz="1050" dirty="0">
-                <a:solidFill>
-                  <a:srgbClr val="9AA5B1"/>
-                </a:solidFill>
-                <a:latin typeface="Calibri" pitchFamily="34" charset="0"/>
-                <a:ea typeface="Calibri" pitchFamily="34" charset="-122"/>
-                <a:cs typeface="Calibri" pitchFamily="34" charset="-120"/>
-              </a:rPr>
-              <a:t>SHA-256 evidence chain + integrity verifier</a:t>
-            </a:r>
-            <a:endParaRPr lang="en-US" sz="1050" dirty="0"/>
-          </a:p>
-          <a:p>
-            <a:pPr marL="152400" indent="-152400">
-              <a:lnSpc>
-                <a:spcPts val="1400"/>
-              </a:lnSpc>
-              <a:spcAft>
-                <a:spcPts val="500"/>
-              </a:spcAft>
-              <a:buSzPct val="100000"/>
-              <a:buChar char="•"/>
-            </a:pPr>
-            <a:r>
-              <a:rPr lang="en-US" sz="1050" dirty="0">
-                <a:solidFill>
-                  <a:srgbClr val="9AA5B1"/>
-                </a:solidFill>
-                <a:latin typeface="Calibri" pitchFamily="34" charset="0"/>
-                <a:ea typeface="Calibri" pitchFamily="34" charset="-122"/>
-                <a:cs typeface="Calibri" pitchFamily="34" charset="-120"/>
-              </a:rPr>
-              <a:t>Lazy decay at read time — no scheduler to fail</a:t>
-            </a:r>
-            <a:endParaRPr lang="en-US" sz="1050" dirty="0"/>
-          </a:p>
-          <a:p>
-            <a:pPr marL="152400" indent="-152400">
-              <a:lnSpc>
-                <a:spcPts val="1400"/>
-              </a:lnSpc>
-              <a:spcAft>
-                <a:spcPts val="500"/>
-              </a:spcAft>
-              <a:buSzPct val="100000"/>
-              <a:buChar char="•"/>
-            </a:pPr>
-            <a:r>
-              <a:rPr lang="en-US" sz="1050" dirty="0">
-                <a:solidFill>
-                  <a:srgbClr val="9AA5B1"/>
-                </a:solidFill>
-                <a:latin typeface="Calibri" pitchFamily="34" charset="0"/>
-                <a:ea typeface="Calibri" pitchFamily="34" charset="-122"/>
-                <a:cs typeface="Calibri" pitchFamily="34" charset="-120"/>
-              </a:rPr>
-              <a:t>Latency harness · CI · demo orchestration</a:t>
-            </a:r>
-            <a:endParaRPr lang="en-US" sz="1050" dirty="0"/>
-          </a:p>
-        </p:txBody>
-      </p:sp>
-      <p:sp>
-        <p:nvSpPr>
-          <p:cNvPr id="22" name="Shape 20"/>
-          <p:cNvSpPr/>
-          <p:nvPr/>
-        </p:nvSpPr>
-        <p:spPr>
-          <a:xfrm>
-            <a:off x="7973568" y="1737360"/>
-            <a:ext cx="3493008" cy="3200400"/>
+              <a:t>Service, evidence chain, CI, demo orchestration.</a:t>
+            </a:r>
+            <a:endParaRPr lang="en-US" sz="850" dirty="0"/>
+          </a:p>
+        </p:txBody>
+      </p:sp>
+      <p:sp>
+        <p:nvSpPr>
+          <p:cNvPr id="26" name="Shape 24"/>
+          <p:cNvSpPr/>
+          <p:nvPr/>
+        </p:nvSpPr>
+        <p:spPr>
+          <a:xfrm>
+            <a:off x="6181344" y="1645920"/>
+            <a:ext cx="2596896" cy="1444752"/>
           </a:xfrm>
           <a:prstGeom prst="roundRect">
             <a:avLst>
-              <a:gd name="adj" fmla="val 1714"/>
+              <a:gd name="adj" fmla="val 3797"/>
             </a:avLst>
           </a:prstGeom>
           <a:solidFill>
@@ -23979,14 +23997,764 @@
       </p:sp>
       <p:sp>
         <p:nvSpPr>
-          <p:cNvPr id="23" name="Shape 21"/>
-          <p:cNvSpPr/>
-          <p:nvPr/>
-        </p:nvSpPr>
-        <p:spPr>
-          <a:xfrm>
-            <a:off x="8211312" y="1938528"/>
-            <a:ext cx="475488" cy="475488"/>
+          <p:cNvPr id="27" name="Shape 25"/>
+          <p:cNvSpPr/>
+          <p:nvPr/>
+        </p:nvSpPr>
+        <p:spPr>
+          <a:xfrm>
+            <a:off x="6327648" y="1773936"/>
+            <a:ext cx="365760" cy="365760"/>
+          </a:xfrm>
+          <a:prstGeom prst="ellipse">
+            <a:avLst/>
+          </a:prstGeom>
+          <a:solidFill>
+            <a:srgbClr val="4B32A8"/>
+          </a:solidFill>
+          <a:ln w="6350">
+            <a:solidFill>
+              <a:srgbClr val="4B32A8"/>
+            </a:solidFill>
+            <a:prstDash val="solid"/>
+          </a:ln>
+        </p:spPr>
+      </p:sp>
+      <p:sp>
+        <p:nvSpPr>
+          <p:cNvPr id="28" name="Text 26"/>
+          <p:cNvSpPr/>
+          <p:nvPr/>
+        </p:nvSpPr>
+        <p:spPr>
+          <a:xfrm>
+            <a:off x="6327648" y="1773936"/>
+            <a:ext cx="365760" cy="365760"/>
+          </a:xfrm>
+          <a:prstGeom prst="rect">
+            <a:avLst/>
+          </a:prstGeom>
+          <a:noFill/>
+          <a:ln/>
+        </p:spPr>
+        <p:txBody>
+          <a:bodyPr wrap="square" lIns="0" tIns="0" rIns="0" bIns="0" rtlCol="0" anchor="ctr"/>
+          <a:lstStyle/>
+          <a:p>
+            <a:pPr algn="ctr" indent="0" marL="0">
+              <a:buNone/>
+            </a:pPr>
+            <a:r>
+              <a:rPr lang="en-US" sz="880" b="1" dirty="0">
+                <a:solidFill>
+                  <a:srgbClr val="FFFFFF"/>
+                </a:solidFill>
+                <a:latin typeface="Calibri" pitchFamily="34" charset="0"/>
+                <a:ea typeface="Calibri" pitchFamily="34" charset="-122"/>
+                <a:cs typeface="Calibri" pitchFamily="34" charset="-120"/>
+              </a:rPr>
+              <a:t>BA</a:t>
+            </a:r>
+            <a:endParaRPr lang="en-US" sz="880" dirty="0"/>
+          </a:p>
+        </p:txBody>
+      </p:sp>
+      <p:sp>
+        <p:nvSpPr>
+          <p:cNvPr id="29" name="Text 27"/>
+          <p:cNvSpPr/>
+          <p:nvPr/>
+        </p:nvSpPr>
+        <p:spPr>
+          <a:xfrm>
+            <a:off x="6766560" y="1755648"/>
+            <a:ext cx="1883664" cy="219456"/>
+          </a:xfrm>
+          <a:prstGeom prst="rect">
+            <a:avLst/>
+          </a:prstGeom>
+          <a:noFill/>
+          <a:ln/>
+        </p:spPr>
+        <p:txBody>
+          <a:bodyPr wrap="square" lIns="0" tIns="0" rIns="0" bIns="0" rtlCol="0" anchor="ctr"/>
+          <a:lstStyle/>
+          <a:p>
+            <a:pPr indent="0" marL="0">
+              <a:buNone/>
+            </a:pPr>
+            <a:r>
+              <a:rPr lang="en-US" sz="1000" b="1" dirty="0">
+                <a:solidFill>
+                  <a:srgbClr val="F2F4F7"/>
+                </a:solidFill>
+                <a:latin typeface="Calibri" pitchFamily="34" charset="0"/>
+                <a:ea typeface="Calibri" pitchFamily="34" charset="-122"/>
+                <a:cs typeface="Calibri" pitchFamily="34" charset="-120"/>
+              </a:rPr>
+              <a:t>Babatunde Adelusi</a:t>
+            </a:r>
+            <a:endParaRPr lang="en-US" sz="1000" dirty="0"/>
+          </a:p>
+        </p:txBody>
+      </p:sp>
+      <p:sp>
+        <p:nvSpPr>
+          <p:cNvPr id="30" name="Text 28"/>
+          <p:cNvSpPr/>
+          <p:nvPr/>
+        </p:nvSpPr>
+        <p:spPr>
+          <a:xfrm>
+            <a:off x="6766560" y="1965960"/>
+            <a:ext cx="1883664" cy="173736"/>
+          </a:xfrm>
+          <a:prstGeom prst="rect">
+            <a:avLst/>
+          </a:prstGeom>
+          <a:noFill/>
+          <a:ln/>
+        </p:spPr>
+        <p:txBody>
+          <a:bodyPr wrap="square" lIns="0" tIns="0" rIns="0" bIns="0" rtlCol="0" anchor="ctr"/>
+          <a:lstStyle/>
+          <a:p>
+            <a:pPr indent="0" marL="0">
+              <a:buNone/>
+            </a:pPr>
+            <a:r>
+              <a:rPr lang="en-US" sz="750" dirty="0">
+                <a:solidFill>
+                  <a:srgbClr val="9AA5B1"/>
+                </a:solidFill>
+                <a:latin typeface="Calibri" pitchFamily="34" charset="0"/>
+                <a:ea typeface="Calibri" pitchFamily="34" charset="-122"/>
+                <a:cs typeface="Calibri" pitchFamily="34" charset="-120"/>
+              </a:rPr>
+              <a:t>Pretoria</a:t>
+            </a:r>
+            <a:endParaRPr lang="en-US" sz="750" dirty="0"/>
+          </a:p>
+        </p:txBody>
+      </p:sp>
+      <p:sp>
+        <p:nvSpPr>
+          <p:cNvPr id="31" name="Text 29"/>
+          <p:cNvSpPr/>
+          <p:nvPr/>
+        </p:nvSpPr>
+        <p:spPr>
+          <a:xfrm>
+            <a:off x="6327648" y="2212848"/>
+            <a:ext cx="2304288" cy="201168"/>
+          </a:xfrm>
+          <a:prstGeom prst="rect">
+            <a:avLst/>
+          </a:prstGeom>
+          <a:noFill/>
+          <a:ln/>
+        </p:spPr>
+        <p:txBody>
+          <a:bodyPr wrap="square" lIns="0" tIns="0" rIns="0" bIns="0" rtlCol="0" anchor="ctr"/>
+          <a:lstStyle/>
+          <a:p>
+            <a:pPr indent="0" marL="0">
+              <a:buNone/>
+            </a:pPr>
+            <a:r>
+              <a:rPr lang="en-US" sz="850" b="1" spc="80" kern="0" dirty="0">
+                <a:solidFill>
+                  <a:srgbClr val="4B32A8"/>
+                </a:solidFill>
+                <a:latin typeface="Calibri" pitchFamily="34" charset="0"/>
+                <a:ea typeface="Calibri" pitchFamily="34" charset="-122"/>
+                <a:cs typeface="Calibri" pitchFamily="34" charset="-120"/>
+              </a:rPr>
+              <a:t>BUSINESS DEVELOPER</a:t>
+            </a:r>
+            <a:endParaRPr lang="en-US" sz="850" dirty="0"/>
+          </a:p>
+        </p:txBody>
+      </p:sp>
+      <p:sp>
+        <p:nvSpPr>
+          <p:cNvPr id="32" name="Text 30"/>
+          <p:cNvSpPr/>
+          <p:nvPr/>
+        </p:nvSpPr>
+        <p:spPr>
+          <a:xfrm>
+            <a:off x="6327648" y="2432304"/>
+            <a:ext cx="2304288" cy="566928"/>
+          </a:xfrm>
+          <a:prstGeom prst="rect">
+            <a:avLst/>
+          </a:prstGeom>
+          <a:noFill/>
+          <a:ln/>
+        </p:spPr>
+        <p:txBody>
+          <a:bodyPr wrap="square" lIns="0" tIns="0" rIns="0" bIns="0" rtlCol="0" anchor="t"/>
+          <a:lstStyle/>
+          <a:p>
+            <a:pPr indent="0" marL="0">
+              <a:lnSpc>
+                <a:spcPts val="1100"/>
+              </a:lnSpc>
+              <a:buNone/>
+            </a:pPr>
+            <a:r>
+              <a:rPr lang="en-US" sz="850" dirty="0">
+                <a:solidFill>
+                  <a:srgbClr val="9AA5B1"/>
+                </a:solidFill>
+                <a:latin typeface="Calibri" pitchFamily="34" charset="0"/>
+                <a:ea typeface="Calibri" pitchFamily="34" charset="-122"/>
+                <a:cs typeface="Calibri" pitchFamily="34" charset="-120"/>
+              </a:rPr>
+              <a:t>Business case, unit economics, go-to-market, the pitch.</a:t>
+            </a:r>
+            <a:endParaRPr lang="en-US" sz="850" dirty="0"/>
+          </a:p>
+        </p:txBody>
+      </p:sp>
+      <p:sp>
+        <p:nvSpPr>
+          <p:cNvPr id="33" name="Shape 31"/>
+          <p:cNvSpPr/>
+          <p:nvPr/>
+        </p:nvSpPr>
+        <p:spPr>
+          <a:xfrm>
+            <a:off x="8997696" y="1645920"/>
+            <a:ext cx="2596896" cy="1444752"/>
+          </a:xfrm>
+          <a:prstGeom prst="roundRect">
+            <a:avLst>
+              <a:gd name="adj" fmla="val 3797"/>
+            </a:avLst>
+          </a:prstGeom>
+          <a:solidFill>
+            <a:srgbClr val="18243A"/>
+          </a:solidFill>
+          <a:ln w="12700">
+            <a:solidFill>
+              <a:srgbClr val="2A3950"/>
+            </a:solidFill>
+            <a:prstDash val="solid"/>
+          </a:ln>
+        </p:spPr>
+      </p:sp>
+      <p:sp>
+        <p:nvSpPr>
+          <p:cNvPr id="34" name="Shape 32"/>
+          <p:cNvSpPr/>
+          <p:nvPr/>
+        </p:nvSpPr>
+        <p:spPr>
+          <a:xfrm>
+            <a:off x="9144000" y="1773936"/>
+            <a:ext cx="365760" cy="365760"/>
+          </a:xfrm>
+          <a:prstGeom prst="ellipse">
+            <a:avLst/>
+          </a:prstGeom>
+          <a:solidFill>
+            <a:srgbClr val="2F7AD6"/>
+          </a:solidFill>
+          <a:ln w="6350">
+            <a:solidFill>
+              <a:srgbClr val="2F7AD6"/>
+            </a:solidFill>
+            <a:prstDash val="solid"/>
+          </a:ln>
+        </p:spPr>
+      </p:sp>
+      <p:sp>
+        <p:nvSpPr>
+          <p:cNvPr id="35" name="Text 33"/>
+          <p:cNvSpPr/>
+          <p:nvPr/>
+        </p:nvSpPr>
+        <p:spPr>
+          <a:xfrm>
+            <a:off x="9144000" y="1773936"/>
+            <a:ext cx="365760" cy="365760"/>
+          </a:xfrm>
+          <a:prstGeom prst="rect">
+            <a:avLst/>
+          </a:prstGeom>
+          <a:noFill/>
+          <a:ln/>
+        </p:spPr>
+        <p:txBody>
+          <a:bodyPr wrap="square" lIns="0" tIns="0" rIns="0" bIns="0" rtlCol="0" anchor="ctr"/>
+          <a:lstStyle/>
+          <a:p>
+            <a:pPr algn="ctr" indent="0" marL="0">
+              <a:buNone/>
+            </a:pPr>
+            <a:r>
+              <a:rPr lang="en-US" sz="880" b="1" dirty="0">
+                <a:solidFill>
+                  <a:srgbClr val="FFFFFF"/>
+                </a:solidFill>
+                <a:latin typeface="Calibri" pitchFamily="34" charset="0"/>
+                <a:ea typeface="Calibri" pitchFamily="34" charset="-122"/>
+                <a:cs typeface="Calibri" pitchFamily="34" charset="-120"/>
+              </a:rPr>
+              <a:t>MC</a:t>
+            </a:r>
+            <a:endParaRPr lang="en-US" sz="880" dirty="0"/>
+          </a:p>
+        </p:txBody>
+      </p:sp>
+      <p:sp>
+        <p:nvSpPr>
+          <p:cNvPr id="36" name="Text 34"/>
+          <p:cNvSpPr/>
+          <p:nvPr/>
+        </p:nvSpPr>
+        <p:spPr>
+          <a:xfrm>
+            <a:off x="9582912" y="1755648"/>
+            <a:ext cx="1883664" cy="219456"/>
+          </a:xfrm>
+          <a:prstGeom prst="rect">
+            <a:avLst/>
+          </a:prstGeom>
+          <a:noFill/>
+          <a:ln/>
+        </p:spPr>
+        <p:txBody>
+          <a:bodyPr wrap="square" lIns="0" tIns="0" rIns="0" bIns="0" rtlCol="0" anchor="ctr"/>
+          <a:lstStyle/>
+          <a:p>
+            <a:pPr indent="0" marL="0">
+              <a:buNone/>
+            </a:pPr>
+            <a:r>
+              <a:rPr lang="en-US" sz="1000" b="1" dirty="0">
+                <a:solidFill>
+                  <a:srgbClr val="F2F4F7"/>
+                </a:solidFill>
+                <a:latin typeface="Calibri" pitchFamily="34" charset="0"/>
+                <a:ea typeface="Calibri" pitchFamily="34" charset="-122"/>
+                <a:cs typeface="Calibri" pitchFamily="34" charset="-120"/>
+              </a:rPr>
+              <a:t>Mutarisi Chibaya</a:t>
+            </a:r>
+            <a:endParaRPr lang="en-US" sz="1000" dirty="0"/>
+          </a:p>
+        </p:txBody>
+      </p:sp>
+      <p:sp>
+        <p:nvSpPr>
+          <p:cNvPr id="37" name="Text 35"/>
+          <p:cNvSpPr/>
+          <p:nvPr/>
+        </p:nvSpPr>
+        <p:spPr>
+          <a:xfrm>
+            <a:off x="9582912" y="1965960"/>
+            <a:ext cx="1883664" cy="173736"/>
+          </a:xfrm>
+          <a:prstGeom prst="rect">
+            <a:avLst/>
+          </a:prstGeom>
+          <a:noFill/>
+          <a:ln/>
+        </p:spPr>
+        <p:txBody>
+          <a:bodyPr wrap="square" lIns="0" tIns="0" rIns="0" bIns="0" rtlCol="0" anchor="ctr"/>
+          <a:lstStyle/>
+          <a:p>
+            <a:pPr indent="0" marL="0">
+              <a:buNone/>
+            </a:pPr>
+            <a:r>
+              <a:rPr lang="en-US" sz="750" dirty="0">
+                <a:solidFill>
+                  <a:srgbClr val="9AA5B1"/>
+                </a:solidFill>
+                <a:latin typeface="Calibri" pitchFamily="34" charset="0"/>
+                <a:ea typeface="Calibri" pitchFamily="34" charset="-122"/>
+                <a:cs typeface="Calibri" pitchFamily="34" charset="-120"/>
+              </a:rPr>
+              <a:t>Pretoria</a:t>
+            </a:r>
+            <a:endParaRPr lang="en-US" sz="750" dirty="0"/>
+          </a:p>
+        </p:txBody>
+      </p:sp>
+      <p:sp>
+        <p:nvSpPr>
+          <p:cNvPr id="38" name="Text 36"/>
+          <p:cNvSpPr/>
+          <p:nvPr/>
+        </p:nvSpPr>
+        <p:spPr>
+          <a:xfrm>
+            <a:off x="9144000" y="2212848"/>
+            <a:ext cx="2304288" cy="201168"/>
+          </a:xfrm>
+          <a:prstGeom prst="rect">
+            <a:avLst/>
+          </a:prstGeom>
+          <a:noFill/>
+          <a:ln/>
+        </p:spPr>
+        <p:txBody>
+          <a:bodyPr wrap="square" lIns="0" tIns="0" rIns="0" bIns="0" rtlCol="0" anchor="ctr"/>
+          <a:lstStyle/>
+          <a:p>
+            <a:pPr indent="0" marL="0">
+              <a:buNone/>
+            </a:pPr>
+            <a:r>
+              <a:rPr lang="en-US" sz="850" b="1" spc="80" kern="0" dirty="0">
+                <a:solidFill>
+                  <a:srgbClr val="2F7AD6"/>
+                </a:solidFill>
+                <a:latin typeface="Calibri" pitchFamily="34" charset="0"/>
+                <a:ea typeface="Calibri" pitchFamily="34" charset="-122"/>
+                <a:cs typeface="Calibri" pitchFamily="34" charset="-120"/>
+              </a:rPr>
+              <a:t>FRONTEND DEVELOPER</a:t>
+            </a:r>
+            <a:endParaRPr lang="en-US" sz="850" dirty="0"/>
+          </a:p>
+        </p:txBody>
+      </p:sp>
+      <p:sp>
+        <p:nvSpPr>
+          <p:cNvPr id="39" name="Text 37"/>
+          <p:cNvSpPr/>
+          <p:nvPr/>
+        </p:nvSpPr>
+        <p:spPr>
+          <a:xfrm>
+            <a:off x="9144000" y="2432304"/>
+            <a:ext cx="2304288" cy="566928"/>
+          </a:xfrm>
+          <a:prstGeom prst="rect">
+            <a:avLst/>
+          </a:prstGeom>
+          <a:noFill/>
+          <a:ln/>
+        </p:spPr>
+        <p:txBody>
+          <a:bodyPr wrap="square" lIns="0" tIns="0" rIns="0" bIns="0" rtlCol="0" anchor="t"/>
+          <a:lstStyle/>
+          <a:p>
+            <a:pPr indent="0" marL="0">
+              <a:lnSpc>
+                <a:spcPts val="1100"/>
+              </a:lnSpc>
+              <a:buNone/>
+            </a:pPr>
+            <a:r>
+              <a:rPr lang="en-US" sz="850" dirty="0">
+                <a:solidFill>
+                  <a:srgbClr val="9AA5B1"/>
+                </a:solidFill>
+                <a:latin typeface="Calibri" pitchFamily="34" charset="0"/>
+                <a:ea typeface="Calibri" pitchFamily="34" charset="-122"/>
+                <a:cs typeface="Calibri" pitchFamily="34" charset="-120"/>
+              </a:rPr>
+              <a:t>Operator dashboard and the member-facing screens.</a:t>
+            </a:r>
+            <a:endParaRPr lang="en-US" sz="850" dirty="0"/>
+          </a:p>
+        </p:txBody>
+      </p:sp>
+      <p:sp>
+        <p:nvSpPr>
+          <p:cNvPr id="40" name="Shape 38"/>
+          <p:cNvSpPr/>
+          <p:nvPr/>
+        </p:nvSpPr>
+        <p:spPr>
+          <a:xfrm>
+            <a:off x="1965960" y="3200400"/>
+            <a:ext cx="2596896" cy="1444752"/>
+          </a:xfrm>
+          <a:prstGeom prst="roundRect">
+            <a:avLst>
+              <a:gd name="adj" fmla="val 3797"/>
+            </a:avLst>
+          </a:prstGeom>
+          <a:solidFill>
+            <a:srgbClr val="18243A"/>
+          </a:solidFill>
+          <a:ln w="12700">
+            <a:solidFill>
+              <a:srgbClr val="2A3950"/>
+            </a:solidFill>
+            <a:prstDash val="solid"/>
+          </a:ln>
+        </p:spPr>
+      </p:sp>
+      <p:sp>
+        <p:nvSpPr>
+          <p:cNvPr id="41" name="Shape 39"/>
+          <p:cNvSpPr/>
+          <p:nvPr/>
+        </p:nvSpPr>
+        <p:spPr>
+          <a:xfrm>
+            <a:off x="2112264" y="3328416"/>
+            <a:ext cx="365760" cy="365760"/>
+          </a:xfrm>
+          <a:prstGeom prst="ellipse">
+            <a:avLst/>
+          </a:prstGeom>
+          <a:solidFill>
+            <a:srgbClr val="21B573"/>
+          </a:solidFill>
+          <a:ln w="6350">
+            <a:solidFill>
+              <a:srgbClr val="21B573"/>
+            </a:solidFill>
+            <a:prstDash val="solid"/>
+          </a:ln>
+        </p:spPr>
+      </p:sp>
+      <p:sp>
+        <p:nvSpPr>
+          <p:cNvPr id="42" name="Text 40"/>
+          <p:cNvSpPr/>
+          <p:nvPr/>
+        </p:nvSpPr>
+        <p:spPr>
+          <a:xfrm>
+            <a:off x="2112264" y="3328416"/>
+            <a:ext cx="365760" cy="365760"/>
+          </a:xfrm>
+          <a:prstGeom prst="rect">
+            <a:avLst/>
+          </a:prstGeom>
+          <a:noFill/>
+          <a:ln/>
+        </p:spPr>
+        <p:txBody>
+          <a:bodyPr wrap="square" lIns="0" tIns="0" rIns="0" bIns="0" rtlCol="0" anchor="ctr"/>
+          <a:lstStyle/>
+          <a:p>
+            <a:pPr algn="ctr" indent="0" marL="0">
+              <a:buNone/>
+            </a:pPr>
+            <a:r>
+              <a:rPr lang="en-US" sz="880" b="1" dirty="0">
+                <a:solidFill>
+                  <a:srgbClr val="FFFFFF"/>
+                </a:solidFill>
+                <a:latin typeface="Calibri" pitchFamily="34" charset="0"/>
+                <a:ea typeface="Calibri" pitchFamily="34" charset="-122"/>
+                <a:cs typeface="Calibri" pitchFamily="34" charset="-120"/>
+              </a:rPr>
+              <a:t>KM</a:t>
+            </a:r>
+            <a:endParaRPr lang="en-US" sz="880" dirty="0"/>
+          </a:p>
+        </p:txBody>
+      </p:sp>
+      <p:sp>
+        <p:nvSpPr>
+          <p:cNvPr id="43" name="Text 41"/>
+          <p:cNvSpPr/>
+          <p:nvPr/>
+        </p:nvSpPr>
+        <p:spPr>
+          <a:xfrm>
+            <a:off x="2551176" y="3310128"/>
+            <a:ext cx="1883664" cy="219456"/>
+          </a:xfrm>
+          <a:prstGeom prst="rect">
+            <a:avLst/>
+          </a:prstGeom>
+          <a:noFill/>
+          <a:ln/>
+        </p:spPr>
+        <p:txBody>
+          <a:bodyPr wrap="square" lIns="0" tIns="0" rIns="0" bIns="0" rtlCol="0" anchor="ctr"/>
+          <a:lstStyle/>
+          <a:p>
+            <a:pPr indent="0" marL="0">
+              <a:buNone/>
+            </a:pPr>
+            <a:r>
+              <a:rPr lang="en-US" sz="1000" b="1" dirty="0">
+                <a:solidFill>
+                  <a:srgbClr val="F2F4F7"/>
+                </a:solidFill>
+                <a:latin typeface="Calibri" pitchFamily="34" charset="0"/>
+                <a:ea typeface="Calibri" pitchFamily="34" charset="-122"/>
+                <a:cs typeface="Calibri" pitchFamily="34" charset="-120"/>
+              </a:rPr>
+              <a:t>Khutso Mothopa</a:t>
+            </a:r>
+            <a:endParaRPr lang="en-US" sz="1000" dirty="0"/>
+          </a:p>
+        </p:txBody>
+      </p:sp>
+      <p:sp>
+        <p:nvSpPr>
+          <p:cNvPr id="44" name="Text 42"/>
+          <p:cNvSpPr/>
+          <p:nvPr/>
+        </p:nvSpPr>
+        <p:spPr>
+          <a:xfrm>
+            <a:off x="2551176" y="3520440"/>
+            <a:ext cx="1883664" cy="173736"/>
+          </a:xfrm>
+          <a:prstGeom prst="rect">
+            <a:avLst/>
+          </a:prstGeom>
+          <a:noFill/>
+          <a:ln/>
+        </p:spPr>
+        <p:txBody>
+          <a:bodyPr wrap="square" lIns="0" tIns="0" rIns="0" bIns="0" rtlCol="0" anchor="ctr"/>
+          <a:lstStyle/>
+          <a:p>
+            <a:pPr indent="0" marL="0">
+              <a:buNone/>
+            </a:pPr>
+            <a:r>
+              <a:rPr lang="en-US" sz="750" dirty="0">
+                <a:solidFill>
+                  <a:srgbClr val="9AA5B1"/>
+                </a:solidFill>
+                <a:latin typeface="Calibri" pitchFamily="34" charset="0"/>
+                <a:ea typeface="Calibri" pitchFamily="34" charset="-122"/>
+                <a:cs typeface="Calibri" pitchFamily="34" charset="-120"/>
+              </a:rPr>
+              <a:t>Witwatersrand</a:t>
+            </a:r>
+            <a:endParaRPr lang="en-US" sz="750" dirty="0"/>
+          </a:p>
+        </p:txBody>
+      </p:sp>
+      <p:sp>
+        <p:nvSpPr>
+          <p:cNvPr id="45" name="Text 43"/>
+          <p:cNvSpPr/>
+          <p:nvPr/>
+        </p:nvSpPr>
+        <p:spPr>
+          <a:xfrm>
+            <a:off x="2112264" y="3767328"/>
+            <a:ext cx="2304288" cy="201168"/>
+          </a:xfrm>
+          <a:prstGeom prst="rect">
+            <a:avLst/>
+          </a:prstGeom>
+          <a:noFill/>
+          <a:ln/>
+        </p:spPr>
+        <p:txBody>
+          <a:bodyPr wrap="square" lIns="0" tIns="0" rIns="0" bIns="0" rtlCol="0" anchor="ctr"/>
+          <a:lstStyle/>
+          <a:p>
+            <a:pPr indent="0" marL="0">
+              <a:buNone/>
+            </a:pPr>
+            <a:r>
+              <a:rPr lang="en-US" sz="850" b="1" spc="80" kern="0" dirty="0">
+                <a:solidFill>
+                  <a:srgbClr val="21B573"/>
+                </a:solidFill>
+                <a:latin typeface="Calibri" pitchFamily="34" charset="0"/>
+                <a:ea typeface="Calibri" pitchFamily="34" charset="-122"/>
+                <a:cs typeface="Calibri" pitchFamily="34" charset="-120"/>
+              </a:rPr>
+              <a:t>SYSTEM ANALYST</a:t>
+            </a:r>
+            <a:endParaRPr lang="en-US" sz="850" dirty="0"/>
+          </a:p>
+        </p:txBody>
+      </p:sp>
+      <p:sp>
+        <p:nvSpPr>
+          <p:cNvPr id="46" name="Text 44"/>
+          <p:cNvSpPr/>
+          <p:nvPr/>
+        </p:nvSpPr>
+        <p:spPr>
+          <a:xfrm>
+            <a:off x="2112264" y="3986784"/>
+            <a:ext cx="2304288" cy="566928"/>
+          </a:xfrm>
+          <a:prstGeom prst="rect">
+            <a:avLst/>
+          </a:prstGeom>
+          <a:noFill/>
+          <a:ln/>
+        </p:spPr>
+        <p:txBody>
+          <a:bodyPr wrap="square" lIns="0" tIns="0" rIns="0" bIns="0" rtlCol="0" anchor="t"/>
+          <a:lstStyle/>
+          <a:p>
+            <a:pPr indent="0" marL="0">
+              <a:lnSpc>
+                <a:spcPts val="1100"/>
+              </a:lnSpc>
+              <a:buNone/>
+            </a:pPr>
+            <a:r>
+              <a:rPr lang="en-US" sz="850" dirty="0">
+                <a:solidFill>
+                  <a:srgbClr val="9AA5B1"/>
+                </a:solidFill>
+                <a:latin typeface="Calibri" pitchFamily="34" charset="0"/>
+                <a:ea typeface="Calibri" pitchFamily="34" charset="-122"/>
+                <a:cs typeface="Calibri" pitchFamily="34" charset="-120"/>
+              </a:rPr>
+              <a:t>Requirements, work breakdown, traceability, verification map.</a:t>
+            </a:r>
+            <a:endParaRPr lang="en-US" sz="850" dirty="0"/>
+          </a:p>
+        </p:txBody>
+      </p:sp>
+      <p:sp>
+        <p:nvSpPr>
+          <p:cNvPr id="47" name="Shape 45"/>
+          <p:cNvSpPr/>
+          <p:nvPr/>
+        </p:nvSpPr>
+        <p:spPr>
+          <a:xfrm>
+            <a:off x="4782312" y="3200400"/>
+            <a:ext cx="2596896" cy="1444752"/>
+          </a:xfrm>
+          <a:prstGeom prst="roundRect">
+            <a:avLst>
+              <a:gd name="adj" fmla="val 3797"/>
+            </a:avLst>
+          </a:prstGeom>
+          <a:solidFill>
+            <a:srgbClr val="18243A"/>
+          </a:solidFill>
+          <a:ln w="12700">
+            <a:solidFill>
+              <a:srgbClr val="2A3950"/>
+            </a:solidFill>
+            <a:prstDash val="solid"/>
+          </a:ln>
+        </p:spPr>
+      </p:sp>
+      <p:sp>
+        <p:nvSpPr>
+          <p:cNvPr id="48" name="Shape 46"/>
+          <p:cNvSpPr/>
+          <p:nvPr/>
+        </p:nvSpPr>
+        <p:spPr>
+          <a:xfrm>
+            <a:off x="4928616" y="3328416"/>
+            <a:ext cx="365760" cy="365760"/>
           </a:xfrm>
           <a:prstGeom prst="ellipse">
             <a:avLst/>
@@ -24004,14 +24772,14 @@
       </p:sp>
       <p:sp>
         <p:nvSpPr>
-          <p:cNvPr id="24" name="Text 22"/>
-          <p:cNvSpPr/>
-          <p:nvPr/>
-        </p:nvSpPr>
-        <p:spPr>
-          <a:xfrm>
-            <a:off x="8211312" y="1938528"/>
-            <a:ext cx="475488" cy="475488"/>
+          <p:cNvPr id="49" name="Text 47"/>
+          <p:cNvSpPr/>
+          <p:nvPr/>
+        </p:nvSpPr>
+        <p:spPr>
+          <a:xfrm>
+            <a:off x="4928616" y="3328416"/>
+            <a:ext cx="365760" cy="365760"/>
           </a:xfrm>
           <a:prstGeom prst="rect">
             <a:avLst/>
@@ -24027,7 +24795,7 @@
               <a:buNone/>
             </a:pPr>
             <a:r>
-              <a:rPr lang="en-US" sz="1144" b="1" dirty="0">
+              <a:rPr lang="en-US" sz="880" b="1" dirty="0">
                 <a:solidFill>
                   <a:srgbClr val="FFFFFF"/>
                 </a:solidFill>
@@ -24035,22 +24803,139 @@
                 <a:ea typeface="Calibri" pitchFamily="34" charset="-122"/>
                 <a:cs typeface="Calibri" pitchFamily="34" charset="-120"/>
               </a:rPr>
-              <a:t>C</a:t>
-            </a:r>
-            <a:endParaRPr lang="en-US" sz="1144" dirty="0"/>
-          </a:p>
-        </p:txBody>
-      </p:sp>
-      <p:sp>
-        <p:nvSpPr>
-          <p:cNvPr id="25" name="Text 23"/>
-          <p:cNvSpPr/>
-          <p:nvPr/>
-        </p:nvSpPr>
-        <p:spPr>
-          <a:xfrm>
-            <a:off x="8211312" y="2523744"/>
-            <a:ext cx="3017520" cy="512064"/>
+              <a:t>VK</a:t>
+            </a:r>
+            <a:endParaRPr lang="en-US" sz="880" dirty="0"/>
+          </a:p>
+        </p:txBody>
+      </p:sp>
+      <p:sp>
+        <p:nvSpPr>
+          <p:cNvPr id="50" name="Text 48"/>
+          <p:cNvSpPr/>
+          <p:nvPr/>
+        </p:nvSpPr>
+        <p:spPr>
+          <a:xfrm>
+            <a:off x="5367528" y="3310128"/>
+            <a:ext cx="1883664" cy="219456"/>
+          </a:xfrm>
+          <a:prstGeom prst="rect">
+            <a:avLst/>
+          </a:prstGeom>
+          <a:noFill/>
+          <a:ln/>
+        </p:spPr>
+        <p:txBody>
+          <a:bodyPr wrap="square" lIns="0" tIns="0" rIns="0" bIns="0" rtlCol="0" anchor="ctr"/>
+          <a:lstStyle/>
+          <a:p>
+            <a:pPr indent="0" marL="0">
+              <a:buNone/>
+            </a:pPr>
+            <a:r>
+              <a:rPr lang="en-US" sz="1000" b="1" dirty="0">
+                <a:solidFill>
+                  <a:srgbClr val="F2F4F7"/>
+                </a:solidFill>
+                <a:latin typeface="Calibri" pitchFamily="34" charset="0"/>
+                <a:ea typeface="Calibri" pitchFamily="34" charset="-122"/>
+                <a:cs typeface="Calibri" pitchFamily="34" charset="-120"/>
+              </a:rPr>
+              <a:t>Vukosi Khoza</a:t>
+            </a:r>
+            <a:endParaRPr lang="en-US" sz="1000" dirty="0"/>
+          </a:p>
+        </p:txBody>
+      </p:sp>
+      <p:sp>
+        <p:nvSpPr>
+          <p:cNvPr id="51" name="Text 49"/>
+          <p:cNvSpPr/>
+          <p:nvPr/>
+        </p:nvSpPr>
+        <p:spPr>
+          <a:xfrm>
+            <a:off x="5367528" y="3520440"/>
+            <a:ext cx="1883664" cy="173736"/>
+          </a:xfrm>
+          <a:prstGeom prst="rect">
+            <a:avLst/>
+          </a:prstGeom>
+          <a:noFill/>
+          <a:ln/>
+        </p:spPr>
+        <p:txBody>
+          <a:bodyPr wrap="square" lIns="0" tIns="0" rIns="0" bIns="0" rtlCol="0" anchor="ctr"/>
+          <a:lstStyle/>
+          <a:p>
+            <a:pPr indent="0" marL="0">
+              <a:buNone/>
+            </a:pPr>
+            <a:r>
+              <a:rPr lang="en-US" sz="750" dirty="0">
+                <a:solidFill>
+                  <a:srgbClr val="9AA5B1"/>
+                </a:solidFill>
+                <a:latin typeface="Calibri" pitchFamily="34" charset="0"/>
+                <a:ea typeface="Calibri" pitchFamily="34" charset="-122"/>
+                <a:cs typeface="Calibri" pitchFamily="34" charset="-120"/>
+              </a:rPr>
+              <a:t>Witwatersrand</a:t>
+            </a:r>
+            <a:endParaRPr lang="en-US" sz="750" dirty="0"/>
+          </a:p>
+        </p:txBody>
+      </p:sp>
+      <p:sp>
+        <p:nvSpPr>
+          <p:cNvPr id="52" name="Text 50"/>
+          <p:cNvSpPr/>
+          <p:nvPr/>
+        </p:nvSpPr>
+        <p:spPr>
+          <a:xfrm>
+            <a:off x="4928616" y="3767328"/>
+            <a:ext cx="2304288" cy="201168"/>
+          </a:xfrm>
+          <a:prstGeom prst="rect">
+            <a:avLst/>
+          </a:prstGeom>
+          <a:noFill/>
+          <a:ln/>
+        </p:spPr>
+        <p:txBody>
+          <a:bodyPr wrap="square" lIns="0" tIns="0" rIns="0" bIns="0" rtlCol="0" anchor="ctr"/>
+          <a:lstStyle/>
+          <a:p>
+            <a:pPr indent="0" marL="0">
+              <a:buNone/>
+            </a:pPr>
+            <a:r>
+              <a:rPr lang="en-US" sz="850" b="1" spc="80" kern="0" dirty="0">
+                <a:solidFill>
+                  <a:srgbClr val="EA6A25"/>
+                </a:solidFill>
+                <a:latin typeface="Calibri" pitchFamily="34" charset="0"/>
+                <a:ea typeface="Calibri" pitchFamily="34" charset="-122"/>
+                <a:cs typeface="Calibri" pitchFamily="34" charset="-120"/>
+              </a:rPr>
+              <a:t>IOT DEVELOPER</a:t>
+            </a:r>
+            <a:endParaRPr lang="en-US" sz="850" dirty="0"/>
+          </a:p>
+        </p:txBody>
+      </p:sp>
+      <p:sp>
+        <p:nvSpPr>
+          <p:cNvPr id="53" name="Text 51"/>
+          <p:cNvSpPr/>
+          <p:nvPr/>
+        </p:nvSpPr>
+        <p:spPr>
+          <a:xfrm>
+            <a:off x="4928616" y="3986784"/>
+            <a:ext cx="2304288" cy="566928"/>
           </a:xfrm>
           <a:prstGeom prst="rect">
             <a:avLst/>
@@ -24064,58 +24949,12 @@
           <a:p>
             <a:pPr indent="0" marL="0">
               <a:lnSpc>
-                <a:spcPts val="1800"/>
+                <a:spcPts val="1100"/>
               </a:lnSpc>
               <a:buNone/>
             </a:pPr>
             <a:r>
-              <a:rPr lang="en-US" sz="1350" b="1" dirty="0">
-                <a:solidFill>
-                  <a:srgbClr val="F2F4F7"/>
-                </a:solidFill>
-                <a:latin typeface="Cambria" pitchFamily="34" charset="0"/>
-                <a:ea typeface="Cambria" pitchFamily="34" charset="-122"/>
-                <a:cs typeface="Cambria" pitchFamily="34" charset="-120"/>
-              </a:rPr>
-              <a:t>Data science, risk modelling, business case</a:t>
-            </a:r>
-            <a:endParaRPr lang="en-US" sz="1350" dirty="0"/>
-          </a:p>
-        </p:txBody>
-      </p:sp>
-      <p:sp>
-        <p:nvSpPr>
-          <p:cNvPr id="26" name="Text 24"/>
-          <p:cNvSpPr/>
-          <p:nvPr/>
-        </p:nvSpPr>
-        <p:spPr>
-          <a:xfrm>
-            <a:off x="8211312" y="3072384"/>
-            <a:ext cx="3017520" cy="1737360"/>
-          </a:xfrm>
-          <a:prstGeom prst="rect">
-            <a:avLst/>
-          </a:prstGeom>
-          <a:noFill/>
-          <a:ln/>
-        </p:spPr>
-        <p:txBody>
-          <a:bodyPr wrap="square" lIns="0" tIns="0" rIns="0" bIns="0" rtlCol="0" anchor="t"/>
-          <a:lstStyle/>
-          <a:p>
-            <a:pPr marL="152400" indent="-152400">
-              <a:lnSpc>
-                <a:spcPts val="1400"/>
-              </a:lnSpc>
-              <a:spcAft>
-                <a:spcPts val="500"/>
-              </a:spcAft>
-              <a:buSzPct val="100000"/>
-              <a:buChar char="•"/>
-            </a:pPr>
-            <a:r>
-              <a:rPr lang="en-US" sz="1050" dirty="0">
+              <a:rPr lang="en-US" sz="850" dirty="0">
                 <a:solidFill>
                   <a:srgbClr val="9AA5B1"/>
                 </a:solidFill>
@@ -24123,98 +24962,26 @@
                 <a:ea typeface="Calibri" pitchFamily="34" charset="-122"/>
                 <a:cs typeface="Calibri" pitchFamily="34" charset="-120"/>
               </a:rPr>
-              <a:t>15,712 records → 764 hotspots → 709 geocoded</a:t>
-            </a:r>
-            <a:endParaRPr lang="en-US" sz="1050" dirty="0"/>
-          </a:p>
-          <a:p>
-            <a:pPr marL="152400" indent="-152400">
-              <a:lnSpc>
-                <a:spcPts val="1400"/>
-              </a:lnSpc>
-              <a:spcAft>
-                <a:spcPts val="500"/>
-              </a:spcAft>
-              <a:buSzPct val="100000"/>
-              <a:buChar char="•"/>
-            </a:pPr>
-            <a:r>
-              <a:rPr lang="en-US" sz="1050" dirty="0">
-                <a:solidFill>
-                  <a:srgbClr val="9AA5B1"/>
-                </a:solidFill>
-                <a:latin typeface="Calibri" pitchFamily="34" charset="0"/>
-                <a:ea typeface="Calibri" pitchFamily="34" charset="-122"/>
-                <a:cs typeface="Calibri" pitchFamily="34" charset="-120"/>
-              </a:rPr>
-              <a:t>Calibration harness, ECE, false-alarm budget</a:t>
-            </a:r>
-            <a:endParaRPr lang="en-US" sz="1050" dirty="0"/>
-          </a:p>
-          <a:p>
-            <a:pPr marL="152400" indent="-152400">
-              <a:lnSpc>
-                <a:spcPts val="1400"/>
-              </a:lnSpc>
-              <a:spcAft>
-                <a:spcPts val="500"/>
-              </a:spcAft>
-              <a:buSzPct val="100000"/>
-              <a:buChar char="•"/>
-            </a:pPr>
-            <a:r>
-              <a:rPr lang="en-US" sz="1050" dirty="0">
-                <a:solidFill>
-                  <a:srgbClr val="9AA5B1"/>
-                </a:solidFill>
-                <a:latin typeface="Calibri" pitchFamily="34" charset="0"/>
-                <a:ea typeface="Calibri" pitchFamily="34" charset="-122"/>
-                <a:cs typeface="Calibri" pitchFamily="34" charset="-120"/>
-              </a:rPr>
-              <a:t>Published the held-out backtest — including the failure</a:t>
-            </a:r>
-            <a:endParaRPr lang="en-US" sz="1050" dirty="0"/>
-          </a:p>
-          <a:p>
-            <a:pPr marL="152400" indent="-152400">
-              <a:lnSpc>
-                <a:spcPts val="1400"/>
-              </a:lnSpc>
-              <a:spcAft>
-                <a:spcPts val="500"/>
-              </a:spcAft>
-              <a:buSzPct val="100000"/>
-              <a:buChar char="•"/>
-            </a:pPr>
-            <a:r>
-              <a:rPr lang="en-US" sz="1050" dirty="0">
-                <a:solidFill>
-                  <a:srgbClr val="9AA5B1"/>
-                </a:solidFill>
-                <a:latin typeface="Calibri" pitchFamily="34" charset="0"/>
-                <a:ea typeface="Calibri" pitchFamily="34" charset="-122"/>
-                <a:cs typeface="Calibri" pitchFamily="34" charset="-120"/>
-              </a:rPr>
-              <a:t>The rand figures, and which of them are estimates</a:t>
-            </a:r>
-            <a:endParaRPr lang="en-US" sz="1050" dirty="0"/>
-          </a:p>
-        </p:txBody>
-      </p:sp>
-      <p:sp>
-        <p:nvSpPr>
-          <p:cNvPr id="27" name="Shape 25"/>
-          <p:cNvSpPr/>
-          <p:nvPr/>
-        </p:nvSpPr>
-        <p:spPr>
-          <a:xfrm>
-            <a:off x="548640" y="5120640"/>
-            <a:ext cx="5394960" cy="1188720"/>
+              <a:t>KHAYA appliance — sensors, edge runtime, power, tamper.</a:t>
+            </a:r>
+            <a:endParaRPr lang="en-US" sz="850" dirty="0"/>
+          </a:p>
+        </p:txBody>
+      </p:sp>
+      <p:sp>
+        <p:nvSpPr>
+          <p:cNvPr id="54" name="Shape 52"/>
+          <p:cNvSpPr/>
+          <p:nvPr/>
+        </p:nvSpPr>
+        <p:spPr>
+          <a:xfrm>
+            <a:off x="7598664" y="3200400"/>
+            <a:ext cx="2596896" cy="1444752"/>
           </a:xfrm>
           <a:prstGeom prst="roundRect">
             <a:avLst>
-              <a:gd name="adj" fmla="val 4615"/>
+              <a:gd name="adj" fmla="val 3797"/>
             </a:avLst>
           </a:prstGeom>
           <a:solidFill>
@@ -24230,99 +24997,349 @@
       </p:sp>
       <p:sp>
         <p:nvSpPr>
-          <p:cNvPr id="28" name="Text 26"/>
-          <p:cNvSpPr/>
-          <p:nvPr/>
-        </p:nvSpPr>
-        <p:spPr>
-          <a:xfrm>
-            <a:off x="822960" y="5257800"/>
-            <a:ext cx="4937760" cy="256032"/>
-          </a:xfrm>
-          <a:prstGeom prst="rect">
-            <a:avLst/>
-          </a:prstGeom>
-          <a:noFill/>
-          <a:ln/>
-        </p:spPr>
-        <p:txBody>
-          <a:bodyPr wrap="square" lIns="0" tIns="0" rIns="0" bIns="0" rtlCol="0" anchor="ctr"/>
-          <a:lstStyle/>
-          <a:p>
-            <a:pPr indent="0" marL="0">
-              <a:buNone/>
-            </a:pPr>
-            <a:r>
-              <a:rPr lang="en-US" sz="1100" b="1" spc="100" kern="0" dirty="0">
-                <a:solidFill>
-                  <a:srgbClr val="E9A23B"/>
-                </a:solidFill>
-                <a:latin typeface="Calibri" pitchFamily="34" charset="0"/>
-                <a:ea typeface="Calibri" pitchFamily="34" charset="-122"/>
-                <a:cs typeface="Calibri" pitchFamily="34" charset="-120"/>
-              </a:rPr>
-              <a:t>How three people ship this</a:t>
-            </a:r>
-            <a:endParaRPr lang="en-US" sz="1100" dirty="0"/>
-          </a:p>
-        </p:txBody>
-      </p:sp>
-      <p:sp>
-        <p:nvSpPr>
-          <p:cNvPr id="29" name="Text 27"/>
-          <p:cNvSpPr/>
-          <p:nvPr/>
-        </p:nvSpPr>
-        <p:spPr>
-          <a:xfrm>
-            <a:off x="822960" y="5532120"/>
-            <a:ext cx="4937760" cy="658368"/>
-          </a:xfrm>
-          <a:prstGeom prst="rect">
-            <a:avLst/>
-          </a:prstGeom>
-          <a:noFill/>
-          <a:ln/>
-        </p:spPr>
-        <p:txBody>
-          <a:bodyPr wrap="square" lIns="0" tIns="0" rIns="0" bIns="0" rtlCol="0" anchor="ctr"/>
+          <p:cNvPr id="55" name="Shape 53"/>
+          <p:cNvSpPr/>
+          <p:nvPr/>
+        </p:nvSpPr>
+        <p:spPr>
+          <a:xfrm>
+            <a:off x="7744968" y="3328416"/>
+            <a:ext cx="365760" cy="365760"/>
+          </a:xfrm>
+          <a:prstGeom prst="ellipse">
+            <a:avLst/>
+          </a:prstGeom>
+          <a:solidFill>
+            <a:srgbClr val="4B32A8"/>
+          </a:solidFill>
+          <a:ln w="6350">
+            <a:solidFill>
+              <a:srgbClr val="4B32A8"/>
+            </a:solidFill>
+            <a:prstDash val="solid"/>
+          </a:ln>
+        </p:spPr>
+      </p:sp>
+      <p:sp>
+        <p:nvSpPr>
+          <p:cNvPr id="56" name="Text 54"/>
+          <p:cNvSpPr/>
+          <p:nvPr/>
+        </p:nvSpPr>
+        <p:spPr>
+          <a:xfrm>
+            <a:off x="7744968" y="3328416"/>
+            <a:ext cx="365760" cy="365760"/>
+          </a:xfrm>
+          <a:prstGeom prst="rect">
+            <a:avLst/>
+          </a:prstGeom>
+          <a:noFill/>
+          <a:ln/>
+        </p:spPr>
+        <p:txBody>
+          <a:bodyPr wrap="square" lIns="0" tIns="0" rIns="0" bIns="0" rtlCol="0" anchor="ctr"/>
+          <a:lstStyle/>
+          <a:p>
+            <a:pPr algn="ctr" indent="0" marL="0">
+              <a:buNone/>
+            </a:pPr>
+            <a:r>
+              <a:rPr lang="en-US" sz="880" b="1" dirty="0">
+                <a:solidFill>
+                  <a:srgbClr val="FFFFFF"/>
+                </a:solidFill>
+                <a:latin typeface="Calibri" pitchFamily="34" charset="0"/>
+                <a:ea typeface="Calibri" pitchFamily="34" charset="-122"/>
+                <a:cs typeface="Calibri" pitchFamily="34" charset="-120"/>
+              </a:rPr>
+              <a:t>IM</a:t>
+            </a:r>
+            <a:endParaRPr lang="en-US" sz="880" dirty="0"/>
+          </a:p>
+        </p:txBody>
+      </p:sp>
+      <p:sp>
+        <p:nvSpPr>
+          <p:cNvPr id="57" name="Text 55"/>
+          <p:cNvSpPr/>
+          <p:nvPr/>
+        </p:nvSpPr>
+        <p:spPr>
+          <a:xfrm>
+            <a:off x="8183880" y="3310128"/>
+            <a:ext cx="1883664" cy="219456"/>
+          </a:xfrm>
+          <a:prstGeom prst="rect">
+            <a:avLst/>
+          </a:prstGeom>
+          <a:noFill/>
+          <a:ln/>
+        </p:spPr>
+        <p:txBody>
+          <a:bodyPr wrap="square" lIns="0" tIns="0" rIns="0" bIns="0" rtlCol="0" anchor="ctr"/>
+          <a:lstStyle/>
+          <a:p>
+            <a:pPr indent="0" marL="0">
+              <a:buNone/>
+            </a:pPr>
+            <a:r>
+              <a:rPr lang="en-US" sz="1000" b="1" dirty="0">
+                <a:solidFill>
+                  <a:srgbClr val="F2F4F7"/>
+                </a:solidFill>
+                <a:latin typeface="Calibri" pitchFamily="34" charset="0"/>
+                <a:ea typeface="Calibri" pitchFamily="34" charset="-122"/>
+                <a:cs typeface="Calibri" pitchFamily="34" charset="-120"/>
+              </a:rPr>
+              <a:t>Ipeleng Constance Modise</a:t>
+            </a:r>
+            <a:endParaRPr lang="en-US" sz="1000" dirty="0"/>
+          </a:p>
+        </p:txBody>
+      </p:sp>
+      <p:sp>
+        <p:nvSpPr>
+          <p:cNvPr id="58" name="Text 56"/>
+          <p:cNvSpPr/>
+          <p:nvPr/>
+        </p:nvSpPr>
+        <p:spPr>
+          <a:xfrm>
+            <a:off x="8183880" y="3520440"/>
+            <a:ext cx="1883664" cy="173736"/>
+          </a:xfrm>
+          <a:prstGeom prst="rect">
+            <a:avLst/>
+          </a:prstGeom>
+          <a:noFill/>
+          <a:ln/>
+        </p:spPr>
+        <p:txBody>
+          <a:bodyPr wrap="square" lIns="0" tIns="0" rIns="0" bIns="0" rtlCol="0" anchor="ctr"/>
+          <a:lstStyle/>
+          <a:p>
+            <a:pPr indent="0" marL="0">
+              <a:buNone/>
+            </a:pPr>
+            <a:r>
+              <a:rPr lang="en-US" sz="750" dirty="0">
+                <a:solidFill>
+                  <a:srgbClr val="9AA5B1"/>
+                </a:solidFill>
+                <a:latin typeface="Calibri" pitchFamily="34" charset="0"/>
+                <a:ea typeface="Calibri" pitchFamily="34" charset="-122"/>
+                <a:cs typeface="Calibri" pitchFamily="34" charset="-120"/>
+              </a:rPr>
+              <a:t>Tshwane University of Technology</a:t>
+            </a:r>
+            <a:endParaRPr lang="en-US" sz="750" dirty="0"/>
+          </a:p>
+        </p:txBody>
+      </p:sp>
+      <p:sp>
+        <p:nvSpPr>
+          <p:cNvPr id="59" name="Text 57"/>
+          <p:cNvSpPr/>
+          <p:nvPr/>
+        </p:nvSpPr>
+        <p:spPr>
+          <a:xfrm>
+            <a:off x="7744968" y="3767328"/>
+            <a:ext cx="2304288" cy="201168"/>
+          </a:xfrm>
+          <a:prstGeom prst="rect">
+            <a:avLst/>
+          </a:prstGeom>
+          <a:noFill/>
+          <a:ln/>
+        </p:spPr>
+        <p:txBody>
+          <a:bodyPr wrap="square" lIns="0" tIns="0" rIns="0" bIns="0" rtlCol="0" anchor="ctr"/>
+          <a:lstStyle/>
+          <a:p>
+            <a:pPr indent="0" marL="0">
+              <a:buNone/>
+            </a:pPr>
+            <a:r>
+              <a:rPr lang="en-US" sz="850" b="1" spc="80" kern="0" dirty="0">
+                <a:solidFill>
+                  <a:srgbClr val="4B32A8"/>
+                </a:solidFill>
+                <a:latin typeface="Calibri" pitchFamily="34" charset="0"/>
+                <a:ea typeface="Calibri" pitchFamily="34" charset="-122"/>
+                <a:cs typeface="Calibri" pitchFamily="34" charset="-120"/>
+              </a:rPr>
+              <a:t>SECURITY DESIGNER</a:t>
+            </a:r>
+            <a:endParaRPr lang="en-US" sz="850" dirty="0"/>
+          </a:p>
+        </p:txBody>
+      </p:sp>
+      <p:sp>
+        <p:nvSpPr>
+          <p:cNvPr id="60" name="Text 58"/>
+          <p:cNvSpPr/>
+          <p:nvPr/>
+        </p:nvSpPr>
+        <p:spPr>
+          <a:xfrm>
+            <a:off x="7744968" y="3986784"/>
+            <a:ext cx="2304288" cy="566928"/>
+          </a:xfrm>
+          <a:prstGeom prst="rect">
+            <a:avLst/>
+          </a:prstGeom>
+          <a:noFill/>
+          <a:ln/>
+        </p:spPr>
+        <p:txBody>
+          <a:bodyPr wrap="square" lIns="0" tIns="0" rIns="0" bIns="0" rtlCol="0" anchor="t"/>
           <a:lstStyle/>
           <a:p>
             <a:pPr indent="0" marL="0">
               <a:lnSpc>
-                <a:spcPts val="1400"/>
+                <a:spcPts val="1100"/>
               </a:lnSpc>
               <a:buNone/>
             </a:pPr>
             <a:r>
-              <a:rPr lang="en-US" sz="1100" dirty="0">
-                <a:solidFill>
-                  <a:srgbClr val="F2F4F7"/>
-                </a:solidFill>
-                <a:latin typeface="Calibri" pitchFamily="34" charset="0"/>
-                <a:ea typeface="Calibri" pitchFamily="34" charset="-122"/>
-                <a:cs typeface="Calibri" pitchFamily="34" charset="-120"/>
-              </a:rPr>
-              <a:t>Frozen contracts so nobody blocks. Sequenced gates, not concurrent sprints. Every change through a pull request. Tests are the specification, so a regression is caught by a machine and not by whoever remembers.</a:t>
-            </a:r>
-            <a:endParaRPr lang="en-US" sz="1100" dirty="0"/>
-          </a:p>
-        </p:txBody>
-      </p:sp>
-      <p:sp>
-        <p:nvSpPr>
-          <p:cNvPr id="30" name="Shape 28"/>
-          <p:cNvSpPr/>
-          <p:nvPr/>
-        </p:nvSpPr>
-        <p:spPr>
-          <a:xfrm>
-            <a:off x="6217920" y="5120640"/>
-            <a:ext cx="5394960" cy="1188720"/>
+              <a:rPr lang="en-US" sz="850" dirty="0">
+                <a:solidFill>
+                  <a:srgbClr val="9AA5B1"/>
+                </a:solidFill>
+                <a:latin typeface="Calibri" pitchFamily="34" charset="0"/>
+                <a:ea typeface="Calibri" pitchFamily="34" charset="-122"/>
+                <a:cs typeface="Calibri" pitchFamily="34" charset="-120"/>
+              </a:rPr>
+              <a:t>OWASP coverage, threat model, SSDLC, physical security.</a:t>
+            </a:r>
+            <a:endParaRPr lang="en-US" sz="850" dirty="0"/>
+          </a:p>
+        </p:txBody>
+      </p:sp>
+      <p:sp>
+        <p:nvSpPr>
+          <p:cNvPr id="61" name="Shape 59"/>
+          <p:cNvSpPr/>
+          <p:nvPr/>
+        </p:nvSpPr>
+        <p:spPr>
+          <a:xfrm>
+            <a:off x="548640" y="4791456"/>
+            <a:ext cx="5394960" cy="1463040"/>
           </a:xfrm>
           <a:prstGeom prst="roundRect">
             <a:avLst>
-              <a:gd name="adj" fmla="val 4615"/>
+              <a:gd name="adj" fmla="val 3750"/>
+            </a:avLst>
+          </a:prstGeom>
+          <a:solidFill>
+            <a:srgbClr val="18243A"/>
+          </a:solidFill>
+          <a:ln w="12700">
+            <a:solidFill>
+              <a:srgbClr val="2A3950"/>
+            </a:solidFill>
+            <a:prstDash val="solid"/>
+          </a:ln>
+        </p:spPr>
+      </p:sp>
+      <p:sp>
+        <p:nvSpPr>
+          <p:cNvPr id="62" name="Text 60"/>
+          <p:cNvSpPr/>
+          <p:nvPr/>
+        </p:nvSpPr>
+        <p:spPr>
+          <a:xfrm>
+            <a:off x="822960" y="4919472"/>
+            <a:ext cx="4937760" cy="237744"/>
+          </a:xfrm>
+          <a:prstGeom prst="rect">
+            <a:avLst/>
+          </a:prstGeom>
+          <a:noFill/>
+          <a:ln/>
+        </p:spPr>
+        <p:txBody>
+          <a:bodyPr wrap="square" lIns="0" tIns="0" rIns="0" bIns="0" rtlCol="0" anchor="ctr"/>
+          <a:lstStyle/>
+          <a:p>
+            <a:pPr indent="0" marL="0">
+              <a:buNone/>
+            </a:pPr>
+            <a:r>
+              <a:rPr lang="en-US" sz="1050" b="1" spc="100" kern="0" dirty="0">
+                <a:solidFill>
+                  <a:srgbClr val="E9A23B"/>
+                </a:solidFill>
+                <a:latin typeface="Calibri" pitchFamily="34" charset="0"/>
+                <a:ea typeface="Calibri" pitchFamily="34" charset="-122"/>
+                <a:cs typeface="Calibri" pitchFamily="34" charset="-120"/>
+              </a:rPr>
+              <a:t>Skills coverage</a:t>
+            </a:r>
+            <a:endParaRPr lang="en-US" sz="1050" dirty="0"/>
+          </a:p>
+        </p:txBody>
+      </p:sp>
+      <p:sp>
+        <p:nvSpPr>
+          <p:cNvPr id="63" name="Text 61"/>
+          <p:cNvSpPr/>
+          <p:nvPr/>
+        </p:nvSpPr>
+        <p:spPr>
+          <a:xfrm>
+            <a:off x="822960" y="5175504"/>
+            <a:ext cx="4937760" cy="950976"/>
+          </a:xfrm>
+          <a:prstGeom prst="rect">
+            <a:avLst/>
+          </a:prstGeom>
+          <a:noFill/>
+          <a:ln/>
+        </p:spPr>
+        <p:txBody>
+          <a:bodyPr wrap="square" lIns="0" tIns="0" rIns="0" bIns="0" rtlCol="0" anchor="t"/>
+          <a:lstStyle/>
+          <a:p>
+            <a:pPr indent="0" marL="0">
+              <a:lnSpc>
+                <a:spcPts val="1350"/>
+              </a:lnSpc>
+              <a:buNone/>
+            </a:pPr>
+            <a:r>
+              <a:rPr lang="en-US" sz="1050" dirty="0">
+                <a:solidFill>
+                  <a:srgbClr val="F2F4F7"/>
+                </a:solidFill>
+                <a:latin typeface="Calibri" pitchFamily="34" charset="0"/>
+                <a:ea typeface="Calibri" pitchFamily="34" charset="-122"/>
+                <a:cs typeface="Calibri" pitchFamily="34" charset="-120"/>
+              </a:rPr>
+              <a:t>Software · backend · enterprise architecture · UI/UX · IoT and hardware · security design · systems analysis · business development. Four universities, and gender variety in the team.</a:t>
+            </a:r>
+            <a:endParaRPr lang="en-US" sz="1050" dirty="0"/>
+          </a:p>
+        </p:txBody>
+      </p:sp>
+      <p:sp>
+        <p:nvSpPr>
+          <p:cNvPr id="64" name="Shape 62"/>
+          <p:cNvSpPr/>
+          <p:nvPr/>
+        </p:nvSpPr>
+        <p:spPr>
+          <a:xfrm>
+            <a:off x="6217920" y="4791456"/>
+            <a:ext cx="5394960" cy="1463040"/>
+          </a:xfrm>
+          <a:prstGeom prst="roundRect">
+            <a:avLst>
+              <a:gd name="adj" fmla="val 3750"/>
             </a:avLst>
           </a:prstGeom>
           <a:solidFill>
@@ -24338,30 +25355,30 @@
       </p:sp>
       <p:sp>
         <p:nvSpPr>
-          <p:cNvPr id="31" name="Text 29"/>
-          <p:cNvSpPr/>
-          <p:nvPr/>
-        </p:nvSpPr>
-        <p:spPr>
-          <a:xfrm>
-            <a:off x="6492240" y="5257800"/>
-            <a:ext cx="4846320" cy="256032"/>
-          </a:xfrm>
-          <a:prstGeom prst="rect">
-            <a:avLst/>
-          </a:prstGeom>
-          <a:noFill/>
-          <a:ln/>
-        </p:spPr>
-        <p:txBody>
-          <a:bodyPr wrap="square" lIns="0" tIns="0" rIns="0" bIns="0" rtlCol="0" anchor="ctr"/>
-          <a:lstStyle/>
-          <a:p>
-            <a:pPr indent="0" marL="0">
-              <a:buNone/>
-            </a:pPr>
-            <a:r>
-              <a:rPr lang="en-US" sz="1100" b="1" spc="100" kern="0" dirty="0">
+          <p:cNvPr id="65" name="Text 63"/>
+          <p:cNvSpPr/>
+          <p:nvPr/>
+        </p:nvSpPr>
+        <p:spPr>
+          <a:xfrm>
+            <a:off x="6492240" y="4919472"/>
+            <a:ext cx="4846320" cy="237744"/>
+          </a:xfrm>
+          <a:prstGeom prst="rect">
+            <a:avLst/>
+          </a:prstGeom>
+          <a:noFill/>
+          <a:ln/>
+        </p:spPr>
+        <p:txBody>
+          <a:bodyPr wrap="square" lIns="0" tIns="0" rIns="0" bIns="0" rtlCol="0" anchor="ctr"/>
+          <a:lstStyle/>
+          <a:p>
+            <a:pPr indent="0" marL="0">
+              <a:buNone/>
+            </a:pPr>
+            <a:r>
+              <a:rPr lang="en-US" sz="1050" b="1" spc="100" kern="0" dirty="0">
                 <a:solidFill>
                   <a:srgbClr val="F5898D"/>
                 </a:solidFill>
@@ -24371,39 +25388,39 @@
               </a:rPr>
               <a:t>Stated gap</a:t>
             </a:r>
-            <a:endParaRPr lang="en-US" sz="1100" dirty="0"/>
-          </a:p>
-        </p:txBody>
-      </p:sp>
-      <p:sp>
-        <p:nvSpPr>
-          <p:cNvPr id="32" name="Text 30"/>
-          <p:cNvSpPr/>
-          <p:nvPr/>
-        </p:nvSpPr>
-        <p:spPr>
-          <a:xfrm>
-            <a:off x="6629400" y="5504688"/>
-            <a:ext cx="4709160" cy="713232"/>
-          </a:xfrm>
-          <a:prstGeom prst="rect">
-            <a:avLst/>
-          </a:prstGeom>
-          <a:noFill/>
-          <a:ln/>
-        </p:spPr>
-        <p:txBody>
-          <a:bodyPr wrap="square" lIns="0" tIns="0" rIns="0" bIns="0" rtlCol="0" anchor="ctr"/>
+            <a:endParaRPr lang="en-US" sz="1050" dirty="0"/>
+          </a:p>
+        </p:txBody>
+      </p:sp>
+      <p:sp>
+        <p:nvSpPr>
+          <p:cNvPr id="66" name="Text 64"/>
+          <p:cNvSpPr/>
+          <p:nvPr/>
+        </p:nvSpPr>
+        <p:spPr>
+          <a:xfrm>
+            <a:off x="6492240" y="5175504"/>
+            <a:ext cx="4846320" cy="950976"/>
+          </a:xfrm>
+          <a:prstGeom prst="rect">
+            <a:avLst/>
+          </a:prstGeom>
+          <a:noFill/>
+          <a:ln/>
+        </p:spPr>
+        <p:txBody>
+          <a:bodyPr wrap="square" lIns="0" tIns="0" rIns="0" bIns="0" rtlCol="0" anchor="t"/>
           <a:lstStyle/>
           <a:p>
             <a:pPr indent="0" marL="0">
               <a:lnSpc>
-                <a:spcPts val="1350"/>
+                <a:spcPts val="1250"/>
               </a:lnSpc>
               <a:buNone/>
             </a:pPr>
             <a:r>
-              <a:rPr lang="en-US" sz="1050" dirty="0">
+              <a:rPr lang="en-US" sz="950" dirty="0">
                 <a:solidFill>
                   <a:srgbClr val="F2F4F7"/>
                 </a:solidFill>
@@ -24411,9 +25428,48 @@
                 <a:ea typeface="Calibri" pitchFamily="34" charset="-122"/>
                 <a:cs typeface="Calibri" pitchFamily="34" charset="-120"/>
               </a:rPr>
-              <a:t>Three men, and UI/UX is shared rather than owned. We are recruiting a fourth member — highest value if she brings design or security-sector background, which closes both lines at once. Fourteen exported screen specifications already exist as a handover artefact.</a:t>
-            </a:r>
-            <a:endParaRPr lang="en-US" sz="1050" dirty="0"/>
+              <a:t>We are distributed across four universities and will not have built together in one room until the 25th. UI/UX is now owned rather than shared — but by a co-lead who also owns architecture, which is a single point of failure we are managing, not one we have removed.</a:t>
+            </a:r>
+            <a:endParaRPr lang="en-US" sz="950" dirty="0"/>
+          </a:p>
+        </p:txBody>
+      </p:sp>
+      <p:sp>
+        <p:nvSpPr>
+          <p:cNvPr id="67" name="Text 65"/>
+          <p:cNvSpPr/>
+          <p:nvPr/>
+        </p:nvSpPr>
+        <p:spPr>
+          <a:xfrm>
+            <a:off x="548640" y="6382512"/>
+            <a:ext cx="11064240" cy="274320"/>
+          </a:xfrm>
+          <a:prstGeom prst="rect">
+            <a:avLst/>
+          </a:prstGeom>
+          <a:noFill/>
+          <a:ln/>
+        </p:spPr>
+        <p:txBody>
+          <a:bodyPr wrap="square" lIns="0" tIns="0" rIns="0" bIns="0" rtlCol="0" anchor="ctr"/>
+          <a:lstStyle/>
+          <a:p>
+            <a:pPr indent="0" marL="0">
+              <a:buNone/>
+            </a:pPr>
+            <a:r>
+              <a:rPr lang="en-US" sz="1000" dirty="0">
+                <a:solidFill>
+                  <a:srgbClr val="9AA5B1"/>
+                </a:solidFill>
+                <a:latin typeface="Calibri" pitchFamily="34" charset="0"/>
+                <a:ea typeface="Calibri" pitchFamily="34" charset="-122"/>
+                <a:cs typeface="Calibri" pitchFamily="34" charset="-120"/>
+              </a:rPr>
+              <a:t>Frozen contracts so nobody blocks. Sequenced gates, not concurrent sprints. A pull request for everything, including documents. Tests are the specification.</a:t>
+            </a:r>
+            <a:endParaRPr lang="en-US" sz="1000" dirty="0"/>
           </a:p>
         </p:txBody>
       </p:sp>
